--- a/colon_talk_draft.pptx
+++ b/colon_talk_draft.pptx
@@ -4171,14 +4171,11 @@
           <a:lstStyle/>
           <a:p>
             <a:pPr lvl="0" indent="0" marL="0">
-              <a:spcBef>
-                <a:spcPts val="3000"/>
-              </a:spcBef>
               <a:buNone/>
             </a:pPr>
             <a:r>
-              <a:rPr b="1"/>
-              <a:t>Gastrograffin Challange for malignant small bowel obstruction</a:t>
+              <a:rPr/>
+              <a:t>Classification of Malignancy in Colorectal Polypsgit</a:t>
             </a:r>
           </a:p>
           <a:p>
@@ -4187,7 +4184,25 @@
             </a:pPr>
             <a:r>
               <a:rPr/>
-              <a:t>(Wan Bahrum et al. 2024)</a:t>
+              <a:t>Haggett’s</a:t>
+            </a:r>
+          </a:p>
+          <a:p>
+            <a:pPr lvl="0" indent="0" marL="0">
+              <a:buNone/>
+            </a:pPr>
+            <a:r>
+              <a:rPr/>
+              <a:t>Ueno Classification</a:t>
+            </a:r>
+          </a:p>
+          <a:p>
+            <a:pPr lvl="0" indent="0" marL="0">
+              <a:buNone/>
+            </a:pPr>
+            <a:r>
+              <a:rPr/>
+              <a:t>Submucosal Levels</a:t>
             </a:r>
           </a:p>
           <a:p>
@@ -4199,8 +4214,25 @@
             </a:pPr>
             <a:r>
               <a:rPr b="1"/>
-              <a:t>GI Stromal Tumors</a:t>
-            </a:r>
+              <a:t>Gastrograffin Challange for malignant small bowel obstruction</a:t>
+            </a:r>
+          </a:p>
+          <a:p>
+            <a:pPr lvl="0" indent="0" marL="0">
+              <a:buNone/>
+            </a:pPr>
+            <a:r>
+              <a:rPr/>
+              <a:t>(Wan Bahrum et al. 2024)</a:t>
+            </a:r>
+          </a:p>
+          <a:p>
+            <a:pPr lvl="0" indent="0" marL="0">
+              <a:spcBef>
+                <a:spcPts val="3000"/>
+              </a:spcBef>
+              <a:buNone/>
+            </a:pPr>
           </a:p>
           <a:p>
             <a:pPr lvl="0" indent="0" marL="0">
